--- a/Imag/fig/Imagenes_lab.pptx
+++ b/Imag/fig/Imagenes_lab.pptx
@@ -4123,86 +4123,6 @@
           <a:chExt cx="0" cy="0"/>
         </a:xfrm>
       </p:grpSpPr>
-      <p:sp>
-        <p:nvSpPr>
-          <p:cNvPr id="3" name="Content Placeholder 2">
-            <a:extLst>
-              <a:ext uri="{FF2B5EF4-FFF2-40B4-BE49-F238E27FC236}">
-                <a16:creationId xmlns:a16="http://schemas.microsoft.com/office/drawing/2014/main" id="{E6909D13-C87E-6DD4-C95E-EB72DEFC6FC4}"/>
-              </a:ext>
-            </a:extLst>
-          </p:cNvPr>
-          <p:cNvSpPr>
-            <a:spLocks noGrp="1"/>
-          </p:cNvSpPr>
-          <p:nvPr>
-            <p:ph idx="1"/>
-          </p:nvPr>
-        </p:nvSpPr>
-        <p:spPr/>
-        <p:txBody>
-          <a:bodyPr>
-            <a:normAutofit/>
-          </a:bodyPr>
-          <a:lstStyle/>
-          <a:p>
-            <a:pPr marL="0" indent="0">
-              <a:buNone/>
-            </a:pPr>
-            <a:r>
-              <a:rPr lang="en-US" sz="3600" dirty="0"/>
-              <a:t> </a:t>
-            </a:r>
-            <a:r>
-              <a:rPr lang="en-US" sz="3600" dirty="0" err="1"/>
-              <a:t>dif_altura_abs</a:t>
-            </a:r>
-            <a:r>
-              <a:rPr lang="en-US" sz="3600" dirty="0"/>
-              <a:t> = </a:t>
-            </a:r>
-            <a:r>
-              <a:rPr lang="en-US" sz="3600" dirty="0">
-                <a:solidFill>
-                  <a:srgbClr val="FF0000"/>
-                </a:solidFill>
-              </a:rPr>
-              <a:t>abs</a:t>
-            </a:r>
-            <a:r>
-              <a:rPr lang="en-US" sz="3600" dirty="0"/>
-              <a:t> ( </a:t>
-            </a:r>
-            <a:r>
-              <a:rPr lang="en-US" sz="3600" dirty="0" err="1">
-                <a:solidFill>
-                  <a:schemeClr val="accent1"/>
-                </a:solidFill>
-              </a:rPr>
-              <a:t>altura</a:t>
-            </a:r>
-            <a:r>
-              <a:rPr lang="en-US" sz="3600" dirty="0"/>
-              <a:t> -  </a:t>
-            </a:r>
-            <a:r>
-              <a:rPr lang="en-US" sz="3600" dirty="0">
-                <a:solidFill>
-                  <a:schemeClr val="accent6">
-                    <a:lumMod val="75000"/>
-                  </a:schemeClr>
-                </a:solidFill>
-              </a:rPr>
-              <a:t>1.688</a:t>
-            </a:r>
-            <a:r>
-              <a:rPr lang="en-US" sz="3600" dirty="0"/>
-              <a:t>)</a:t>
-            </a:r>
-            <a:endParaRPr lang="en-CO" sz="3600" dirty="0"/>
-          </a:p>
-        </p:txBody>
-      </p:sp>
       <p:grpSp>
         <p:nvGrpSpPr>
           <p:cNvPr id="20" name="Group 19">
@@ -5836,6 +5756,86 @@
           </p:txBody>
         </p:sp>
       </p:grpSp>
+      <p:sp>
+        <p:nvSpPr>
+          <p:cNvPr id="3" name="Content Placeholder 2">
+            <a:extLst>
+              <a:ext uri="{FF2B5EF4-FFF2-40B4-BE49-F238E27FC236}">
+                <a16:creationId xmlns:a16="http://schemas.microsoft.com/office/drawing/2014/main" id="{E6909D13-C87E-6DD4-C95E-EB72DEFC6FC4}"/>
+              </a:ext>
+            </a:extLst>
+          </p:cNvPr>
+          <p:cNvSpPr>
+            <a:spLocks noGrp="1"/>
+          </p:cNvSpPr>
+          <p:nvPr>
+            <p:ph idx="1"/>
+          </p:nvPr>
+        </p:nvSpPr>
+        <p:spPr/>
+        <p:txBody>
+          <a:bodyPr>
+            <a:normAutofit/>
+          </a:bodyPr>
+          <a:lstStyle/>
+          <a:p>
+            <a:pPr marL="0" indent="0">
+              <a:buNone/>
+            </a:pPr>
+            <a:r>
+              <a:rPr lang="en-US" sz="3600" dirty="0"/>
+              <a:t> </a:t>
+            </a:r>
+            <a:r>
+              <a:rPr lang="en-US" sz="3600" dirty="0" err="1"/>
+              <a:t>dif_altura_abs</a:t>
+            </a:r>
+            <a:r>
+              <a:rPr lang="en-US" sz="3600" dirty="0"/>
+              <a:t> = </a:t>
+            </a:r>
+            <a:r>
+              <a:rPr lang="en-US" sz="3600" dirty="0">
+                <a:solidFill>
+                  <a:srgbClr val="FF0000"/>
+                </a:solidFill>
+              </a:rPr>
+              <a:t>abs</a:t>
+            </a:r>
+            <a:r>
+              <a:rPr lang="en-US" sz="3600" dirty="0"/>
+              <a:t> ( </a:t>
+            </a:r>
+            <a:r>
+              <a:rPr lang="en-US" sz="3600" dirty="0" err="1">
+                <a:solidFill>
+                  <a:schemeClr val="accent1"/>
+                </a:solidFill>
+              </a:rPr>
+              <a:t>altura</a:t>
+            </a:r>
+            <a:r>
+              <a:rPr lang="en-US" sz="3600" dirty="0"/>
+              <a:t> -  </a:t>
+            </a:r>
+            <a:r>
+              <a:rPr lang="en-US" sz="3600" dirty="0">
+                <a:solidFill>
+                  <a:schemeClr val="accent6">
+                    <a:lumMod val="75000"/>
+                  </a:schemeClr>
+                </a:solidFill>
+              </a:rPr>
+              <a:t>1.688</a:t>
+            </a:r>
+            <a:r>
+              <a:rPr lang="en-US" sz="3600" dirty="0"/>
+              <a:t>)</a:t>
+            </a:r>
+            <a:endParaRPr lang="en-CO" sz="3600" dirty="0"/>
+          </a:p>
+        </p:txBody>
+      </p:sp>
     </p:spTree>
     <p:extLst>
       <p:ext uri="{BB962C8B-B14F-4D97-AF65-F5344CB8AC3E}">

--- a/Imag/fig/Imagenes_lab.pptx
+++ b/Imag/fig/Imagenes_lab.pptx
@@ -5772,7 +5772,12 @@
             <p:ph idx="1"/>
           </p:nvPr>
         </p:nvSpPr>
-        <p:spPr/>
+        <p:spPr>
+          <a:xfrm>
+            <a:off x="838200" y="1862264"/>
+            <a:ext cx="10515600" cy="4351338"/>
+          </a:xfrm>
+        </p:spPr>
         <p:txBody>
           <a:bodyPr>
             <a:normAutofit/>
